--- a/NLP/Fin_News_Project/Financial_News_Analysis_Presentation.pptx
+++ b/NLP/Fin_News_Project/Financial_News_Analysis_Presentation.pptx
@@ -3270,36 +3270,16 @@
           <a:p>
             <a:pPr algn="ctr"/>
             <a:r>
+              <a:rPr lang="en-US" altLang="en-GB" sz="4400"/>
+              <a:t>Finance News Topic </a:t>
+            </a:r>
+            <a:r>
               <a:rPr lang="en-IN" altLang="en-US" sz="4400"/>
-              <a:t>F</a:t>
+              <a:t>&amp;</a:t>
             </a:r>
             <a:r>
               <a:rPr lang="en-US" altLang="en-GB" sz="4400"/>
-              <a:t>inancial </a:t>
-            </a:r>
-            <a:r>
-              <a:rPr lang="en-IN" altLang="en-US" sz="4400"/>
-              <a:t>N</a:t>
-            </a:r>
-            <a:r>
-              <a:rPr lang="en-US" altLang="en-GB" sz="4400"/>
-              <a:t>ews </a:t>
-            </a:r>
-            <a:r>
-              <a:rPr lang="en-IN" altLang="en-US" sz="4400"/>
-              <a:t>I</a:t>
-            </a:r>
-            <a:r>
-              <a:rPr lang="en-US" altLang="en-GB" sz="4400"/>
-              <a:t>ntelligence</a:t>
-            </a:r>
-            <a:r>
-              <a:rPr lang="en-IN" altLang="en-US" sz="4400"/>
-              <a:t> S</a:t>
-            </a:r>
-            <a:r>
-              <a:rPr lang="en-US" altLang="en-GB" sz="4400"/>
-              <a:t>ystem</a:t>
+              <a:t> Impact Prediction System</a:t>
             </a:r>
             <a:endParaRPr lang="en-US" altLang="en-GB" sz="4400"/>
           </a:p>
@@ -3389,6 +3369,7 @@
               <a:rPr lang="en-US" altLang="en-GB"/>
               <a:t>There is no quick way to filter what actually matters.</a:t>
             </a:r>
+            <a:endParaRPr lang="en-US" altLang="en-GB"/>
           </a:p>
         </p:txBody>
       </p:sp>
